--- a/docs/presentation.pptx
+++ b/docs/presentation.pptx
@@ -19,9 +19,11 @@
     <p:sldId id="267" r:id="rId13"/>
     <p:sldId id="268" r:id="rId14"/>
     <p:sldId id="269" r:id="rId15"/>
+    <p:sldId id="270" r:id="rId16"/>
+    <p:sldId id="271" r:id="rId17"/>
   </p:sldIdLst>
   <p:notesMasterIdLst>
-    <p:notesMasterId r:id="rId16"/>
+    <p:notesMasterId r:id="rId18"/>
   </p:notesMasterIdLst>
   <p:sldSz cx="12192000" cy="6858000"/>
   <p:notesSz cx="6858000" cy="12192000"/>
@@ -867,7 +869,7 @@
           <a:p>
             <a:r>
               <a:rPr lang="en-US" dirty="0"/>
-              <a:t>Список того, что не доказано, — часть результата, поэтому слайд не убран.</a:t>
+              <a:t>Формат закрыли раньше моделей намеренно: риск нулевого балла снимается один раз и навсегда.</a:t>
             </a:r>
             <a:endParaRPr lang="en-US" dirty="0"/>
           </a:p>
@@ -955,7 +957,7 @@
           <a:p>
             <a:r>
               <a:rPr lang="en-US" dirty="0"/>
-              <a:t>Кеш лежит в репозитории в сжатом колоночном формате — карту можно поднять на свежем клоне без ключей.</a:t>
+              <a:t>Порог по площади гари догнали, но не обошли — в записи это зафиксировано прямо, без сглаживания.</a:t>
             </a:r>
             <a:endParaRPr lang="en-US" dirty="0"/>
           </a:p>
@@ -979,6 +981,182 @@
             <a:fld id="{F7021451-1387-4CA6-816F-3879F97B5CBC}" type="slidenum">
               <a:rPr lang="en-US"/>
               <a:t>14</a:t>
+            </a:fld>
+            <a:endParaRPr lang="en-US"/>
+          </a:p>
+        </p:txBody>
+      </p:sp>
+    </p:spTree>
+    <p:extLst>
+      <p:ext uri="{BB962C8B-B14F-4D97-AF65-F5344CB8AC3E}">
+        <p14:creationId xmlns:p14="http://schemas.microsoft.com/office/powerpoint/2010/main" val="1024086991"/>
+      </p:ext>
+    </p:extLst>
+  </p:cSld>
+  <p:clrMapOvr>
+    <a:masterClrMapping/>
+  </p:clrMapOvr>
+</p:notes>
+</file>
+
+<file path=ppt/notesSlides/notesSlide15.xml><?xml version="1.0" encoding="utf-8"?>
+<p:notes xmlns:a="http://schemas.openxmlformats.org/drawingml/2006/main" xmlns:r="http://schemas.openxmlformats.org/officeDocument/2006/relationships" xmlns:p="http://schemas.openxmlformats.org/presentationml/2006/main">
+  <p:cSld>
+    <p:spTree>
+      <p:nvGrpSpPr>
+        <p:cNvPr id="1" name=""/>
+        <p:cNvGrpSpPr/>
+        <p:nvPr/>
+      </p:nvGrpSpPr>
+      <p:grpSpPr>
+        <a:xfrm>
+          <a:off x="0" y="0"/>
+          <a:ext cx="0" cy="0"/>
+          <a:chOff x="0" y="0"/>
+          <a:chExt cx="0" cy="0"/>
+        </a:xfrm>
+      </p:grpSpPr>
+      <p:sp>
+        <p:nvSpPr>
+          <p:cNvPr id="2" name="Slide Image Placeholder 1"/>
+          <p:cNvSpPr>
+            <a:spLocks noGrp="1" noRot="1" noChangeAspect="1"/>
+          </p:cNvSpPr>
+          <p:nvPr>
+            <p:ph type="sldImg"/>
+          </p:nvPr>
+        </p:nvSpPr>
+        <p:spPr/>
+      </p:sp>
+      <p:sp>
+        <p:nvSpPr>
+          <p:cNvPr id="3" name="Notes Placeholder 2"/>
+          <p:cNvSpPr>
+            <a:spLocks noGrp="1"/>
+          </p:cNvSpPr>
+          <p:nvPr>
+            <p:ph type="body" idx="1"/>
+          </p:nvPr>
+        </p:nvSpPr>
+        <p:spPr/>
+        <p:txBody>
+          <a:bodyPr/>
+          <a:lstStyle/>
+          <a:p>
+            <a:r>
+              <a:rPr lang="en-US" dirty="0"/>
+              <a:t>Список того, что не доказано, — часть результата, поэтому слайд не убран.</a:t>
+            </a:r>
+            <a:endParaRPr lang="en-US" dirty="0"/>
+          </a:p>
+        </p:txBody>
+      </p:sp>
+      <p:sp>
+        <p:nvSpPr>
+          <p:cNvPr id="4" name="Slide Number Placeholder 3"/>
+          <p:cNvSpPr>
+            <a:spLocks noGrp="1"/>
+          </p:cNvSpPr>
+          <p:nvPr>
+            <p:ph type="sldNum" sz="quarter" idx="10"/>
+          </p:nvPr>
+        </p:nvSpPr>
+        <p:spPr/>
+        <p:txBody>
+          <a:bodyPr/>
+          <a:lstStyle/>
+          <a:p>
+            <a:fld id="{F7021451-1387-4CA6-816F-3879F97B5CBC}" type="slidenum">
+              <a:rPr lang="en-US"/>
+              <a:t>15</a:t>
+            </a:fld>
+            <a:endParaRPr lang="en-US"/>
+          </a:p>
+        </p:txBody>
+      </p:sp>
+    </p:spTree>
+    <p:extLst>
+      <p:ext uri="{BB962C8B-B14F-4D97-AF65-F5344CB8AC3E}">
+        <p14:creationId xmlns:p14="http://schemas.microsoft.com/office/powerpoint/2010/main" val="1024086991"/>
+      </p:ext>
+    </p:extLst>
+  </p:cSld>
+  <p:clrMapOvr>
+    <a:masterClrMapping/>
+  </p:clrMapOvr>
+</p:notes>
+</file>
+
+<file path=ppt/notesSlides/notesSlide16.xml><?xml version="1.0" encoding="utf-8"?>
+<p:notes xmlns:a="http://schemas.openxmlformats.org/drawingml/2006/main" xmlns:r="http://schemas.openxmlformats.org/officeDocument/2006/relationships" xmlns:p="http://schemas.openxmlformats.org/presentationml/2006/main">
+  <p:cSld>
+    <p:spTree>
+      <p:nvGrpSpPr>
+        <p:cNvPr id="1" name=""/>
+        <p:cNvGrpSpPr/>
+        <p:nvPr/>
+      </p:nvGrpSpPr>
+      <p:grpSpPr>
+        <a:xfrm>
+          <a:off x="0" y="0"/>
+          <a:ext cx="0" cy="0"/>
+          <a:chOff x="0" y="0"/>
+          <a:chExt cx="0" cy="0"/>
+        </a:xfrm>
+      </p:grpSpPr>
+      <p:sp>
+        <p:nvSpPr>
+          <p:cNvPr id="2" name="Slide Image Placeholder 1"/>
+          <p:cNvSpPr>
+            <a:spLocks noGrp="1" noRot="1" noChangeAspect="1"/>
+          </p:cNvSpPr>
+          <p:nvPr>
+            <p:ph type="sldImg"/>
+          </p:nvPr>
+        </p:nvSpPr>
+        <p:spPr/>
+      </p:sp>
+      <p:sp>
+        <p:nvSpPr>
+          <p:cNvPr id="3" name="Notes Placeholder 2"/>
+          <p:cNvSpPr>
+            <a:spLocks noGrp="1"/>
+          </p:cNvSpPr>
+          <p:nvPr>
+            <p:ph type="body" idx="1"/>
+          </p:nvPr>
+        </p:nvSpPr>
+        <p:spPr/>
+        <p:txBody>
+          <a:bodyPr/>
+          <a:lstStyle/>
+          <a:p>
+            <a:r>
+              <a:rPr lang="en-US" dirty="0"/>
+              <a:t>Кеш лежит в репозитории в сжатом колоночном формате — карту можно поднять на свежем клоне без ключей.</a:t>
+            </a:r>
+            <a:endParaRPr lang="en-US" dirty="0"/>
+          </a:p>
+        </p:txBody>
+      </p:sp>
+      <p:sp>
+        <p:nvSpPr>
+          <p:cNvPr id="4" name="Slide Number Placeholder 3"/>
+          <p:cNvSpPr>
+            <a:spLocks noGrp="1"/>
+          </p:cNvSpPr>
+          <p:nvPr>
+            <p:ph type="sldNum" sz="quarter" idx="10"/>
+          </p:nvPr>
+        </p:nvSpPr>
+        <p:spPr/>
+        <p:txBody>
+          <a:bodyPr/>
+          <a:lstStyle/>
+          <a:p>
+            <a:fld id="{F7021451-1387-4CA6-816F-3879F97B5CBC}" type="slidenum">
+              <a:rPr lang="en-US"/>
+              <a:t>16</a:t>
             </a:fld>
             <a:endParaRPr lang="en-US"/>
           </a:p>
@@ -4082,7 +4260,7 @@
                 <a:ea typeface="Courier New" pitchFamily="34" charset="-122"/>
                 <a:cs typeface="Courier New" pitchFamily="34" charset="-120"/>
               </a:rPr>
-              <a:t>15</a:t>
+              <a:t>21</a:t>
             </a:r>
             <a:endParaRPr lang="en-US" sz="3400" dirty="0"/>
           </a:p>
@@ -4121,7 +4299,7 @@
                 <a:ea typeface="Calibri" pitchFamily="34" charset="-122"/>
                 <a:cs typeface="Calibri" pitchFamily="34" charset="-120"/>
               </a:rPr>
-              <a:t>спецификаций</a:t>
+              <a:t>спецификации</a:t>
             </a:r>
             <a:endParaRPr lang="en-US" sz="1500" dirty="0"/>
           </a:p>
@@ -4229,7 +4407,7 @@
                 <a:ea typeface="Courier New" pitchFamily="34" charset="-122"/>
                 <a:cs typeface="Courier New" pitchFamily="34" charset="-120"/>
               </a:rPr>
-              <a:t>351</a:t>
+              <a:t>425</a:t>
             </a:r>
             <a:endParaRPr lang="en-US" sz="3400" dirty="0"/>
           </a:p>
@@ -4376,7 +4554,7 @@
                 <a:ea typeface="Courier New" pitchFamily="34" charset="-122"/>
                 <a:cs typeface="Courier New" pitchFamily="34" charset="-120"/>
               </a:rPr>
-              <a:t>26</a:t>
+              <a:t>29</a:t>
             </a:r>
             <a:endParaRPr lang="en-US" sz="3400" dirty="0"/>
           </a:p>
@@ -4680,6 +4858,879 @@
 <file path=ppt/slides/slide13.xml><?xml version="1.0" encoding="utf-8"?>
 <p:sld xmlns:a="http://schemas.openxmlformats.org/drawingml/2006/main" xmlns:r="http://schemas.openxmlformats.org/officeDocument/2006/relationships" xmlns:p="http://schemas.openxmlformats.org/presentationml/2006/main">
   <p:cSld name="Slide 13">
+    <p:bg>
+      <p:bgPr>
+        <a:solidFill>
+          <a:srgbClr val="0F1318"/>
+        </a:solidFill>
+      </p:bgPr>
+    </p:bg>
+    <p:spTree>
+      <p:nvGrpSpPr>
+        <p:cNvPr id="1" name=""/>
+        <p:cNvGrpSpPr/>
+        <p:nvPr/>
+      </p:nvGrpSpPr>
+      <p:grpSpPr>
+        <a:xfrm>
+          <a:off x="0" y="0"/>
+          <a:ext cx="0" cy="0"/>
+          <a:chOff x="0" y="0"/>
+          <a:chExt cx="0" cy="0"/>
+        </a:xfrm>
+      </p:grpSpPr>
+      <p:sp>
+        <p:nvSpPr>
+          <p:cNvPr id="2" name="Text 0"/>
+          <p:cNvSpPr txBox="1"/>
+          <p:nvPr/>
+        </p:nvSpPr>
+        <p:spPr>
+          <a:xfrm>
+            <a:off x="685800" y="457200"/>
+            <a:ext cx="10789920" cy="868680"/>
+          </a:xfrm>
+          <a:prstGeom prst="rect">
+            <a:avLst/>
+          </a:prstGeom>
+          <a:noFill/>
+          <a:ln/>
+        </p:spPr>
+        <p:txBody>
+          <a:bodyPr wrap="square" lIns="0" tIns="0" rIns="0" bIns="0" rtlCol="0" anchor="t"/>
+          <a:lstStyle/>
+          <a:p>
+            <a:pPr algn="l" indent="0" marL="0">
+              <a:buNone/>
+            </a:pPr>
+            <a:r>
+              <a:rPr lang="en-US" sz="3600" b="1" dirty="0">
+                <a:solidFill>
+                  <a:srgbClr val="E6E9EE"/>
+                </a:solidFill>
+                <a:latin typeface="Calibri" pitchFamily="34" charset="0"/>
+                <a:ea typeface="Calibri" pitchFamily="34" charset="-122"/>
+                <a:cs typeface="Calibri" pitchFamily="34" charset="-120"/>
+              </a:rPr>
+              <a:t>Ответ соревнования — строка CSV, а не карта</a:t>
+            </a:r>
+            <a:endParaRPr lang="en-US" sz="3600" dirty="0"/>
+          </a:p>
+        </p:txBody>
+      </p:sp>
+      <p:sp>
+        <p:nvSpPr>
+          <p:cNvPr id="3" name="Text 1"/>
+          <p:cNvSpPr txBox="1"/>
+          <p:nvPr/>
+        </p:nvSpPr>
+        <p:spPr>
+          <a:xfrm>
+            <a:off x="685800" y="1463040"/>
+            <a:ext cx="10789920" cy="822960"/>
+          </a:xfrm>
+          <a:prstGeom prst="rect">
+            <a:avLst/>
+          </a:prstGeom>
+          <a:noFill/>
+          <a:ln/>
+        </p:spPr>
+        <p:txBody>
+          <a:bodyPr wrap="square" lIns="0" tIns="0" rIns="0" bIns="0" rtlCol="0" anchor="ctr"/>
+          <a:lstStyle/>
+          <a:p>
+            <a:pPr indent="0" marL="0">
+              <a:lnSpc>
+                <a:spcPts val="2200"/>
+              </a:lnSpc>
+              <a:buNone/>
+            </a:pPr>
+            <a:r>
+              <a:rPr lang="en-US" sz="1500" dirty="0">
+                <a:solidFill>
+                  <a:srgbClr val="BFC7D2"/>
+                </a:solidFill>
+                <a:latin typeface="Calibri" pitchFamily="34" charset="0"/>
+                <a:ea typeface="Calibri" pitchFamily="34" charset="-122"/>
+                <a:cs typeface="Calibri" pitchFamily="34" charset="-120"/>
+              </a:rPr>
+              <a:t>Проверяющая система читает один файл. Маска каждого чипа сжимается в серии «начальный пиксель — длина», по строке на класс. Эта часть закрывалась первой, до всякой модели: решение без валидного файла получает ноль за метрику, а решение со слабым сабмитом — нет.</a:t>
+            </a:r>
+            <a:endParaRPr lang="en-US" sz="1500" dirty="0"/>
+          </a:p>
+        </p:txBody>
+      </p:sp>
+      <p:sp>
+        <p:nvSpPr>
+          <p:cNvPr id="4" name="Shape 2"/>
+          <p:cNvSpPr/>
+          <p:nvPr/>
+        </p:nvSpPr>
+        <p:spPr>
+          <a:xfrm>
+            <a:off x="685800" y="2450592"/>
+            <a:ext cx="5577840" cy="1371600"/>
+          </a:xfrm>
+          <a:prstGeom prst="roundRect">
+            <a:avLst>
+              <a:gd name="adj" fmla="val 6000"/>
+            </a:avLst>
+          </a:prstGeom>
+          <a:solidFill>
+            <a:srgbClr val="161B22"/>
+          </a:solidFill>
+          <a:ln w="12700">
+            <a:solidFill>
+              <a:srgbClr val="2C333D"/>
+            </a:solidFill>
+            <a:prstDash val="solid"/>
+          </a:ln>
+        </p:spPr>
+      </p:sp>
+      <p:sp>
+        <p:nvSpPr>
+          <p:cNvPr id="5" name="Text 3"/>
+          <p:cNvSpPr txBox="1"/>
+          <p:nvPr/>
+        </p:nvSpPr>
+        <p:spPr>
+          <a:xfrm>
+            <a:off x="978408" y="2606040"/>
+            <a:ext cx="5029200" cy="274320"/>
+          </a:xfrm>
+          <a:prstGeom prst="rect">
+            <a:avLst/>
+          </a:prstGeom>
+          <a:noFill/>
+          <a:ln/>
+        </p:spPr>
+        <p:txBody>
+          <a:bodyPr wrap="square" lIns="0" tIns="0" rIns="0" bIns="0" rtlCol="0" anchor="ctr"/>
+          <a:lstStyle/>
+          <a:p>
+            <a:pPr indent="0" marL="0">
+              <a:buNone/>
+            </a:pPr>
+            <a:r>
+              <a:rPr lang="en-US" sz="1300" b="1" dirty="0">
+                <a:solidFill>
+                  <a:srgbClr val="8D97A5"/>
+                </a:solidFill>
+                <a:latin typeface="Courier New" pitchFamily="34" charset="0"/>
+                <a:ea typeface="Courier New" pitchFamily="34" charset="-122"/>
+                <a:cs typeface="Courier New" pitchFamily="34" charset="-120"/>
+              </a:rPr>
+              <a:t>chip_id,class_id,rle</a:t>
+            </a:r>
+            <a:endParaRPr lang="en-US" sz="1300" dirty="0"/>
+          </a:p>
+        </p:txBody>
+      </p:sp>
+      <p:sp>
+        <p:nvSpPr>
+          <p:cNvPr id="6" name="Text 4"/>
+          <p:cNvSpPr txBox="1"/>
+          <p:nvPr/>
+        </p:nvSpPr>
+        <p:spPr>
+          <a:xfrm>
+            <a:off x="978408" y="2926080"/>
+            <a:ext cx="5029200" cy="274320"/>
+          </a:xfrm>
+          <a:prstGeom prst="rect">
+            <a:avLst/>
+          </a:prstGeom>
+          <a:noFill/>
+          <a:ln/>
+        </p:spPr>
+        <p:txBody>
+          <a:bodyPr wrap="square" lIns="0" tIns="0" rIns="0" bIns="0" rtlCol="0" anchor="ctr"/>
+          <a:lstStyle/>
+          <a:p>
+            <a:pPr indent="0" marL="0">
+              <a:buNone/>
+            </a:pPr>
+            <a:r>
+              <a:rPr lang="en-US" sz="1300" dirty="0">
+                <a:solidFill>
+                  <a:srgbClr val="5BC8AF"/>
+                </a:solidFill>
+                <a:latin typeface="Courier New" pitchFamily="34" charset="0"/>
+                <a:ea typeface="Courier New" pitchFamily="34" charset="-122"/>
+                <a:cs typeface="Courier New" pitchFamily="34" charset="-120"/>
+              </a:rPr>
+              <a:t>BS_pub_000004,2,"7 3 143 5 280 2"</a:t>
+            </a:r>
+            <a:endParaRPr lang="en-US" sz="1300" dirty="0"/>
+          </a:p>
+        </p:txBody>
+      </p:sp>
+      <p:sp>
+        <p:nvSpPr>
+          <p:cNvPr id="7" name="Text 5"/>
+          <p:cNvSpPr txBox="1"/>
+          <p:nvPr/>
+        </p:nvSpPr>
+        <p:spPr>
+          <a:xfrm>
+            <a:off x="978408" y="3291840"/>
+            <a:ext cx="5029200" cy="365760"/>
+          </a:xfrm>
+          <a:prstGeom prst="rect">
+            <a:avLst/>
+          </a:prstGeom>
+          <a:noFill/>
+          <a:ln/>
+        </p:spPr>
+        <p:txBody>
+          <a:bodyPr wrap="square" lIns="0" tIns="0" rIns="0" bIns="0" rtlCol="0" anchor="ctr"/>
+          <a:lstStyle/>
+          <a:p>
+            <a:pPr indent="0" marL="0">
+              <a:lnSpc>
+                <a:spcPts val="1600"/>
+              </a:lnSpc>
+              <a:buNone/>
+            </a:pPr>
+            <a:r>
+              <a:rPr lang="en-US" sz="1200" dirty="0">
+                <a:solidFill>
+                  <a:srgbClr val="8D97A5"/>
+                </a:solidFill>
+                <a:latin typeface="Calibri" pitchFamily="34" charset="0"/>
+                <a:ea typeface="Calibri" pitchFamily="34" charset="-122"/>
+                <a:cs typeface="Calibri" pitchFamily="34" charset="-120"/>
+              </a:rPr>
+              <a:t>нумерация с единицы · серии по возрастанию · смежные слиты</a:t>
+            </a:r>
+            <a:endParaRPr lang="en-US" sz="1200" dirty="0"/>
+          </a:p>
+        </p:txBody>
+      </p:sp>
+      <p:sp>
+        <p:nvSpPr>
+          <p:cNvPr id="8" name="Shape 6"/>
+          <p:cNvSpPr/>
+          <p:nvPr/>
+        </p:nvSpPr>
+        <p:spPr>
+          <a:xfrm>
+            <a:off x="6537960" y="2450592"/>
+            <a:ext cx="4937760" cy="914400"/>
+          </a:xfrm>
+          <a:prstGeom prst="roundRect">
+            <a:avLst>
+              <a:gd name="adj" fmla="val 9000"/>
+            </a:avLst>
+          </a:prstGeom>
+          <a:solidFill>
+            <a:srgbClr val="1A1F27"/>
+          </a:solidFill>
+          <a:ln w="12700">
+            <a:solidFill>
+              <a:srgbClr val="2C333D"/>
+            </a:solidFill>
+            <a:prstDash val="solid"/>
+          </a:ln>
+        </p:spPr>
+      </p:sp>
+      <p:sp>
+        <p:nvSpPr>
+          <p:cNvPr id="9" name="Text 7"/>
+          <p:cNvSpPr txBox="1"/>
+          <p:nvPr/>
+        </p:nvSpPr>
+        <p:spPr>
+          <a:xfrm>
+            <a:off x="6766560" y="2578608"/>
+            <a:ext cx="822960" cy="548640"/>
+          </a:xfrm>
+          <a:prstGeom prst="rect">
+            <a:avLst/>
+          </a:prstGeom>
+          <a:noFill/>
+          <a:ln/>
+        </p:spPr>
+        <p:txBody>
+          <a:bodyPr wrap="square" lIns="0" tIns="0" rIns="0" bIns="0" rtlCol="0" anchor="ctr"/>
+          <a:lstStyle/>
+          <a:p>
+            <a:pPr indent="0" marL="0">
+              <a:buNone/>
+            </a:pPr>
+            <a:r>
+              <a:rPr lang="en-US" sz="2600" b="1" dirty="0">
+                <a:solidFill>
+                  <a:srgbClr val="F0A132"/>
+                </a:solidFill>
+                <a:latin typeface="Courier New" pitchFamily="34" charset="0"/>
+                <a:ea typeface="Courier New" pitchFamily="34" charset="-122"/>
+                <a:cs typeface="Courier New" pitchFamily="34" charset="-120"/>
+              </a:rPr>
+              <a:t>447</a:t>
+            </a:r>
+            <a:endParaRPr lang="en-US" sz="2600" dirty="0"/>
+          </a:p>
+        </p:txBody>
+      </p:sp>
+      <p:sp>
+        <p:nvSpPr>
+          <p:cNvPr id="10" name="Text 8"/>
+          <p:cNvSpPr txBox="1"/>
+          <p:nvPr/>
+        </p:nvSpPr>
+        <p:spPr>
+          <a:xfrm>
+            <a:off x="7680960" y="2569464"/>
+            <a:ext cx="3474720" cy="274320"/>
+          </a:xfrm>
+          <a:prstGeom prst="rect">
+            <a:avLst/>
+          </a:prstGeom>
+          <a:noFill/>
+          <a:ln/>
+        </p:spPr>
+        <p:txBody>
+          <a:bodyPr wrap="square" lIns="0" tIns="0" rIns="0" bIns="0" rtlCol="0" anchor="ctr"/>
+          <a:lstStyle/>
+          <a:p>
+            <a:pPr indent="0" marL="0">
+              <a:buNone/>
+            </a:pPr>
+            <a:r>
+              <a:rPr lang="en-US" sz="1400" b="1" dirty="0">
+                <a:solidFill>
+                  <a:srgbClr val="E6E9EE"/>
+                </a:solidFill>
+                <a:latin typeface="Calibri" pitchFamily="34" charset="0"/>
+                <a:ea typeface="Calibri" pitchFamily="34" charset="-122"/>
+                <a:cs typeface="Calibri" pitchFamily="34" charset="-120"/>
+              </a:rPr>
+              <a:t>строк без заголовка</a:t>
+            </a:r>
+            <a:endParaRPr lang="en-US" sz="1400" dirty="0"/>
+          </a:p>
+        </p:txBody>
+      </p:sp>
+      <p:sp>
+        <p:nvSpPr>
+          <p:cNvPr id="11" name="Text 9"/>
+          <p:cNvSpPr txBox="1"/>
+          <p:nvPr/>
+        </p:nvSpPr>
+        <p:spPr>
+          <a:xfrm>
+            <a:off x="7680960" y="2852928"/>
+            <a:ext cx="3474720" cy="411480"/>
+          </a:xfrm>
+          <a:prstGeom prst="rect">
+            <a:avLst/>
+          </a:prstGeom>
+          <a:noFill/>
+          <a:ln/>
+        </p:spPr>
+        <p:txBody>
+          <a:bodyPr wrap="square" lIns="0" tIns="0" rIns="0" bIns="0" rtlCol="0" anchor="ctr"/>
+          <a:lstStyle/>
+          <a:p>
+            <a:pPr indent="0" marL="0">
+              <a:lnSpc>
+                <a:spcPts val="1500"/>
+              </a:lnSpc>
+              <a:buNone/>
+            </a:pPr>
+            <a:r>
+              <a:rPr lang="en-US" sz="1150" dirty="0">
+                <a:solidFill>
+                  <a:srgbClr val="8D97A5"/>
+                </a:solidFill>
+                <a:latin typeface="Calibri" pitchFamily="34" charset="0"/>
+                <a:ea typeface="Calibri" pitchFamily="34" charset="-122"/>
+                <a:cs typeface="Calibri" pitchFamily="34" charset="-120"/>
+              </a:rPr>
+              <a:t>по одной на чип активного горения, по три на чип гари</a:t>
+            </a:r>
+            <a:endParaRPr lang="en-US" sz="1150" dirty="0"/>
+          </a:p>
+        </p:txBody>
+      </p:sp>
+      <p:sp>
+        <p:nvSpPr>
+          <p:cNvPr id="12" name="Shape 10"/>
+          <p:cNvSpPr/>
+          <p:nvPr/>
+        </p:nvSpPr>
+        <p:spPr>
+          <a:xfrm>
+            <a:off x="6537960" y="3474720"/>
+            <a:ext cx="4937760" cy="914400"/>
+          </a:xfrm>
+          <a:prstGeom prst="roundRect">
+            <a:avLst>
+              <a:gd name="adj" fmla="val 9000"/>
+            </a:avLst>
+          </a:prstGeom>
+          <a:solidFill>
+            <a:srgbClr val="1A1F27"/>
+          </a:solidFill>
+          <a:ln w="12700">
+            <a:solidFill>
+              <a:srgbClr val="2C333D"/>
+            </a:solidFill>
+            <a:prstDash val="solid"/>
+          </a:ln>
+        </p:spPr>
+      </p:sp>
+      <p:sp>
+        <p:nvSpPr>
+          <p:cNvPr id="13" name="Text 11"/>
+          <p:cNvSpPr txBox="1"/>
+          <p:nvPr/>
+        </p:nvSpPr>
+        <p:spPr>
+          <a:xfrm>
+            <a:off x="6766560" y="3602736"/>
+            <a:ext cx="822960" cy="548640"/>
+          </a:xfrm>
+          <a:prstGeom prst="rect">
+            <a:avLst/>
+          </a:prstGeom>
+          <a:noFill/>
+          <a:ln/>
+        </p:spPr>
+        <p:txBody>
+          <a:bodyPr wrap="square" lIns="0" tIns="0" rIns="0" bIns="0" rtlCol="0" anchor="ctr"/>
+          <a:lstStyle/>
+          <a:p>
+            <a:pPr indent="0" marL="0">
+              <a:buNone/>
+            </a:pPr>
+            <a:r>
+              <a:rPr lang="en-US" sz="2600" b="1" dirty="0">
+                <a:solidFill>
+                  <a:srgbClr val="F0A132"/>
+                </a:solidFill>
+                <a:latin typeface="Courier New" pitchFamily="34" charset="0"/>
+                <a:ea typeface="Courier New" pitchFamily="34" charset="-122"/>
+                <a:cs typeface="Courier New" pitchFamily="34" charset="-120"/>
+              </a:rPr>
+              <a:t>5</a:t>
+            </a:r>
+            <a:endParaRPr lang="en-US" sz="2600" dirty="0"/>
+          </a:p>
+        </p:txBody>
+      </p:sp>
+      <p:sp>
+        <p:nvSpPr>
+          <p:cNvPr id="14" name="Text 12"/>
+          <p:cNvSpPr txBox="1"/>
+          <p:nvPr/>
+        </p:nvSpPr>
+        <p:spPr>
+          <a:xfrm>
+            <a:off x="7680960" y="3593592"/>
+            <a:ext cx="3474720" cy="274320"/>
+          </a:xfrm>
+          <a:prstGeom prst="rect">
+            <a:avLst/>
+          </a:prstGeom>
+          <a:noFill/>
+          <a:ln/>
+        </p:spPr>
+        <p:txBody>
+          <a:bodyPr wrap="square" lIns="0" tIns="0" rIns="0" bIns="0" rtlCol="0" anchor="ctr"/>
+          <a:lstStyle/>
+          <a:p>
+            <a:pPr indent="0" marL="0">
+              <a:buNone/>
+            </a:pPr>
+            <a:r>
+              <a:rPr lang="en-US" sz="1400" b="1" dirty="0">
+                <a:solidFill>
+                  <a:srgbClr val="E6E9EE"/>
+                </a:solidFill>
+                <a:latin typeface="Calibri" pitchFamily="34" charset="0"/>
+                <a:ea typeface="Calibri" pitchFamily="34" charset="-122"/>
+                <a:cs typeface="Calibri" pitchFamily="34" charset="-120"/>
+              </a:rPr>
+              <a:t>видов подделок отвергаются</a:t>
+            </a:r>
+            <a:endParaRPr lang="en-US" sz="1400" dirty="0"/>
+          </a:p>
+        </p:txBody>
+      </p:sp>
+      <p:sp>
+        <p:nvSpPr>
+          <p:cNvPr id="15" name="Text 13"/>
+          <p:cNvSpPr txBox="1"/>
+          <p:nvPr/>
+        </p:nvSpPr>
+        <p:spPr>
+          <a:xfrm>
+            <a:off x="7680960" y="3877056"/>
+            <a:ext cx="3474720" cy="411480"/>
+          </a:xfrm>
+          <a:prstGeom prst="rect">
+            <a:avLst/>
+          </a:prstGeom>
+          <a:noFill/>
+          <a:ln/>
+        </p:spPr>
+        <p:txBody>
+          <a:bodyPr wrap="square" lIns="0" tIns="0" rIns="0" bIns="0" rtlCol="0" anchor="ctr"/>
+          <a:lstStyle/>
+          <a:p>
+            <a:pPr indent="0" marL="0">
+              <a:lnSpc>
+                <a:spcPts val="1500"/>
+              </a:lnSpc>
+              <a:buNone/>
+            </a:pPr>
+            <a:r>
+              <a:rPr lang="en-US" sz="1150" dirty="0">
+                <a:solidFill>
+                  <a:srgbClr val="8D97A5"/>
+                </a:solidFill>
+                <a:latin typeface="Calibri" pitchFamily="34" charset="0"/>
+                <a:ea typeface="Calibri" pitchFamily="34" charset="-122"/>
+                <a:cs typeface="Calibri" pitchFamily="34" charset="-120"/>
+              </a:rPr>
+              <a:t>лишняя пара, недостающая, пересечение классов, выход за край, пустая ячейка</a:t>
+            </a:r>
+            <a:endParaRPr lang="en-US" sz="1150" dirty="0"/>
+          </a:p>
+        </p:txBody>
+      </p:sp>
+      <p:sp>
+        <p:nvSpPr>
+          <p:cNvPr id="16" name="Shape 14"/>
+          <p:cNvSpPr/>
+          <p:nvPr/>
+        </p:nvSpPr>
+        <p:spPr>
+          <a:xfrm>
+            <a:off x="6537960" y="4498848"/>
+            <a:ext cx="4937760" cy="914400"/>
+          </a:xfrm>
+          <a:prstGeom prst="roundRect">
+            <a:avLst>
+              <a:gd name="adj" fmla="val 9000"/>
+            </a:avLst>
+          </a:prstGeom>
+          <a:solidFill>
+            <a:srgbClr val="1A1F27"/>
+          </a:solidFill>
+          <a:ln w="12700">
+            <a:solidFill>
+              <a:srgbClr val="2C333D"/>
+            </a:solidFill>
+            <a:prstDash val="solid"/>
+          </a:ln>
+        </p:spPr>
+      </p:sp>
+      <p:sp>
+        <p:nvSpPr>
+          <p:cNvPr id="17" name="Text 15"/>
+          <p:cNvSpPr txBox="1"/>
+          <p:nvPr/>
+        </p:nvSpPr>
+        <p:spPr>
+          <a:xfrm>
+            <a:off x="6766560" y="4626864"/>
+            <a:ext cx="822960" cy="548640"/>
+          </a:xfrm>
+          <a:prstGeom prst="rect">
+            <a:avLst/>
+          </a:prstGeom>
+          <a:noFill/>
+          <a:ln/>
+        </p:spPr>
+        <p:txBody>
+          <a:bodyPr wrap="square" lIns="0" tIns="0" rIns="0" bIns="0" rtlCol="0" anchor="ctr"/>
+          <a:lstStyle/>
+          <a:p>
+            <a:pPr indent="0" marL="0">
+              <a:buNone/>
+            </a:pPr>
+            <a:r>
+              <a:rPr lang="en-US" sz="2600" b="1" dirty="0">
+                <a:solidFill>
+                  <a:srgbClr val="F0A132"/>
+                </a:solidFill>
+                <a:latin typeface="Courier New" pitchFamily="34" charset="0"/>
+                <a:ea typeface="Courier New" pitchFamily="34" charset="-122"/>
+                <a:cs typeface="Courier New" pitchFamily="34" charset="-120"/>
+              </a:rPr>
+              <a:t>0</a:t>
+            </a:r>
+            <a:endParaRPr lang="en-US" sz="2600" dirty="0"/>
+          </a:p>
+        </p:txBody>
+      </p:sp>
+      <p:sp>
+        <p:nvSpPr>
+          <p:cNvPr id="18" name="Text 16"/>
+          <p:cNvSpPr txBox="1"/>
+          <p:nvPr/>
+        </p:nvSpPr>
+        <p:spPr>
+          <a:xfrm>
+            <a:off x="7680960" y="4617720"/>
+            <a:ext cx="3474720" cy="274320"/>
+          </a:xfrm>
+          <a:prstGeom prst="rect">
+            <a:avLst/>
+          </a:prstGeom>
+          <a:noFill/>
+          <a:ln/>
+        </p:spPr>
+        <p:txBody>
+          <a:bodyPr wrap="square" lIns="0" tIns="0" rIns="0" bIns="0" rtlCol="0" anchor="ctr"/>
+          <a:lstStyle/>
+          <a:p>
+            <a:pPr indent="0" marL="0">
+              <a:buNone/>
+            </a:pPr>
+            <a:r>
+              <a:rPr lang="en-US" sz="1400" b="1" dirty="0">
+                <a:solidFill>
+                  <a:srgbClr val="E6E9EE"/>
+                </a:solidFill>
+                <a:latin typeface="Calibri" pitchFamily="34" charset="0"/>
+                <a:ea typeface="Calibri" pitchFamily="34" charset="-122"/>
+                <a:cs typeface="Calibri" pitchFamily="34" charset="-120"/>
+              </a:rPr>
+              <a:t>кода возврата при нарушении</a:t>
+            </a:r>
+            <a:endParaRPr lang="en-US" sz="1400" dirty="0"/>
+          </a:p>
+        </p:txBody>
+      </p:sp>
+      <p:sp>
+        <p:nvSpPr>
+          <p:cNvPr id="19" name="Text 17"/>
+          <p:cNvSpPr txBox="1"/>
+          <p:nvPr/>
+        </p:nvSpPr>
+        <p:spPr>
+          <a:xfrm>
+            <a:off x="7680960" y="4901184"/>
+            <a:ext cx="3474720" cy="411480"/>
+          </a:xfrm>
+          <a:prstGeom prst="rect">
+            <a:avLst/>
+          </a:prstGeom>
+          <a:noFill/>
+          <a:ln/>
+        </p:spPr>
+        <p:txBody>
+          <a:bodyPr wrap="square" lIns="0" tIns="0" rIns="0" bIns="0" rtlCol="0" anchor="ctr"/>
+          <a:lstStyle/>
+          <a:p>
+            <a:pPr indent="0" marL="0">
+              <a:lnSpc>
+                <a:spcPts val="1500"/>
+              </a:lnSpc>
+              <a:buNone/>
+            </a:pPr>
+            <a:r>
+              <a:rPr lang="en-US" sz="1150" dirty="0">
+                <a:solidFill>
+                  <a:srgbClr val="8D97A5"/>
+                </a:solidFill>
+                <a:latin typeface="Calibri" pitchFamily="34" charset="0"/>
+                <a:ea typeface="Calibri" pitchFamily="34" charset="-122"/>
+                <a:cs typeface="Calibri" pitchFamily="34" charset="-120"/>
+              </a:rPr>
+              <a:t>молча собранный неверный файл — худший исход</a:t>
+            </a:r>
+            <a:endParaRPr lang="en-US" sz="1150" dirty="0"/>
+          </a:p>
+        </p:txBody>
+      </p:sp>
+      <p:sp>
+        <p:nvSpPr>
+          <p:cNvPr id="20" name="Shape 18"/>
+          <p:cNvSpPr/>
+          <p:nvPr/>
+        </p:nvSpPr>
+        <p:spPr>
+          <a:xfrm>
+            <a:off x="685800" y="3968496"/>
+            <a:ext cx="5577840" cy="1481328"/>
+          </a:xfrm>
+          <a:prstGeom prst="roundRect">
+            <a:avLst>
+              <a:gd name="adj" fmla="val 5556"/>
+            </a:avLst>
+          </a:prstGeom>
+          <a:solidFill>
+            <a:srgbClr val="1E1A16"/>
+          </a:solidFill>
+          <a:ln w="12700">
+            <a:solidFill>
+              <a:srgbClr val="2C333D"/>
+            </a:solidFill>
+            <a:prstDash val="solid"/>
+          </a:ln>
+        </p:spPr>
+      </p:sp>
+      <p:sp>
+        <p:nvSpPr>
+          <p:cNvPr id="21" name="Shape 19"/>
+          <p:cNvSpPr/>
+          <p:nvPr/>
+        </p:nvSpPr>
+        <p:spPr>
+          <a:xfrm>
+            <a:off x="978408" y="4169664"/>
+            <a:ext cx="274320" cy="274320"/>
+          </a:xfrm>
+          <a:prstGeom prst="ellipse">
+            <a:avLst/>
+          </a:prstGeom>
+          <a:solidFill>
+            <a:srgbClr val="E0622B"/>
+          </a:solidFill>
+          <a:ln w="12700">
+            <a:solidFill>
+              <a:srgbClr val="E0622B"/>
+            </a:solidFill>
+            <a:prstDash val="solid"/>
+          </a:ln>
+        </p:spPr>
+      </p:sp>
+      <p:sp>
+        <p:nvSpPr>
+          <p:cNvPr id="22" name="Text 20"/>
+          <p:cNvSpPr txBox="1"/>
+          <p:nvPr/>
+        </p:nvSpPr>
+        <p:spPr>
+          <a:xfrm>
+            <a:off x="1399032" y="4142232"/>
+            <a:ext cx="4663440" cy="329184"/>
+          </a:xfrm>
+          <a:prstGeom prst="rect">
+            <a:avLst/>
+          </a:prstGeom>
+          <a:noFill/>
+          <a:ln/>
+        </p:spPr>
+        <p:txBody>
+          <a:bodyPr wrap="square" lIns="0" tIns="0" rIns="0" bIns="0" rtlCol="0" anchor="ctr"/>
+          <a:lstStyle/>
+          <a:p>
+            <a:pPr indent="0" marL="0">
+              <a:buNone/>
+            </a:pPr>
+            <a:r>
+              <a:rPr lang="en-US" sz="1500" b="1" dirty="0">
+                <a:solidFill>
+                  <a:srgbClr val="E0622B"/>
+                </a:solidFill>
+                <a:latin typeface="Calibri" pitchFamily="34" charset="0"/>
+                <a:ea typeface="Calibri" pitchFamily="34" charset="-122"/>
+                <a:cs typeface="Calibri" pitchFamily="34" charset="-120"/>
+              </a:rPr>
+              <a:t>Модуль инференса не имеет доступа к сети</a:t>
+            </a:r>
+            <a:endParaRPr lang="en-US" sz="1500" dirty="0"/>
+          </a:p>
+        </p:txBody>
+      </p:sp>
+      <p:sp>
+        <p:nvSpPr>
+          <p:cNvPr id="23" name="Text 21"/>
+          <p:cNvSpPr txBox="1"/>
+          <p:nvPr/>
+        </p:nvSpPr>
+        <p:spPr>
+          <a:xfrm>
+            <a:off x="978408" y="4526280"/>
+            <a:ext cx="5029200" cy="822960"/>
+          </a:xfrm>
+          <a:prstGeom prst="rect">
+            <a:avLst/>
+          </a:prstGeom>
+          <a:noFill/>
+          <a:ln/>
+        </p:spPr>
+        <p:txBody>
+          <a:bodyPr wrap="square" lIns="0" tIns="0" rIns="0" bIns="0" rtlCol="0" anchor="ctr"/>
+          <a:lstStyle/>
+          <a:p>
+            <a:pPr indent="0" marL="0">
+              <a:lnSpc>
+                <a:spcPts val="1800"/>
+              </a:lnSpc>
+              <a:buNone/>
+            </a:pPr>
+            <a:r>
+              <a:rPr lang="en-US" sz="1250" dirty="0">
+                <a:solidFill>
+                  <a:srgbClr val="BFC7D2"/>
+                </a:solidFill>
+                <a:latin typeface="Calibri" pitchFamily="34" charset="0"/>
+                <a:ea typeface="Calibri" pitchFamily="34" charset="-122"/>
+                <a:cs typeface="Calibri" pitchFamily="34" charset="-120"/>
+              </a:rPr>
+              <a:t>Применение готовых продуктов обнаружения пожаров — основание для снятия с конкурса. Запрет обеспечен устройством модуля: он читает только каталог чипов и модель с диска.</a:t>
+            </a:r>
+            <a:endParaRPr lang="en-US" sz="1250" dirty="0"/>
+          </a:p>
+        </p:txBody>
+      </p:sp>
+      <p:sp>
+        <p:nvSpPr>
+          <p:cNvPr id="24" name="Text 22"/>
+          <p:cNvSpPr txBox="1"/>
+          <p:nvPr/>
+        </p:nvSpPr>
+        <p:spPr>
+          <a:xfrm>
+            <a:off x="685800" y="6291072"/>
+            <a:ext cx="10789920" cy="310896"/>
+          </a:xfrm>
+          <a:prstGeom prst="rect">
+            <a:avLst/>
+          </a:prstGeom>
+          <a:noFill/>
+          <a:ln/>
+        </p:spPr>
+        <p:txBody>
+          <a:bodyPr wrap="square" lIns="0" tIns="0" rIns="0" bIns="0" rtlCol="0" anchor="ctr"/>
+          <a:lstStyle/>
+          <a:p>
+            <a:pPr indent="0" marL="0">
+              <a:buNone/>
+            </a:pPr>
+            <a:r>
+              <a:rPr lang="en-US" sz="1100" dirty="0">
+                <a:solidFill>
+                  <a:srgbClr val="6A7179"/>
+                </a:solidFill>
+                <a:latin typeface="Calibri" pitchFamily="34" charset="0"/>
+                <a:ea typeface="Calibri" pitchFamily="34" charset="-122"/>
+                <a:cs typeface="Calibri" pitchFamily="34" charset="-120"/>
+              </a:rPr>
+              <a:t>SPEC-16 · валидатор запускается отдельной командой и падает с ненулевым кодом</a:t>
+            </a:r>
+            <a:endParaRPr lang="en-US" sz="1100" dirty="0"/>
+          </a:p>
+        </p:txBody>
+      </p:sp>
+    </p:spTree>
+  </p:cSld>
+  <p:clrMapOvr>
+    <a:masterClrMapping/>
+  </p:clrMapOvr>
+</p:sld>
+</file>
+
+<file path=ppt/slides/slide14.xml><?xml version="1.0" encoding="utf-8"?>
+<p:sld xmlns:a="http://schemas.openxmlformats.org/drawingml/2006/main" xmlns:r="http://schemas.openxmlformats.org/officeDocument/2006/relationships" xmlns:p="http://schemas.openxmlformats.org/presentationml/2006/main">
+  <p:cSld name="Slide 14">
     <p:bg>
       <p:bgPr>
         <a:solidFill>
@@ -4734,7 +5785,7 @@
                 <a:ea typeface="Calibri" pitchFamily="34" charset="-122"/>
                 <a:cs typeface="Calibri" pitchFamily="34" charset="-120"/>
               </a:rPr>
-              <a:t>Чего сервис пока не доказывает</a:t>
+              <a:t>Порог — точка отсчёта, а не соперник</a:t>
             </a:r>
             <a:endParaRPr lang="en-US" sz="3600" dirty="0"/>
           </a:p>
@@ -4742,18 +5793,60 @@
       </p:sp>
       <p:sp>
         <p:nvSpPr>
-          <p:cNvPr id="3" name="Shape 1"/>
+          <p:cNvPr id="3" name="Text 1"/>
+          <p:cNvSpPr txBox="1"/>
+          <p:nvPr/>
+        </p:nvSpPr>
+        <p:spPr>
+          <a:xfrm>
+            <a:off x="685800" y="1463040"/>
+            <a:ext cx="10789920" cy="822960"/>
+          </a:xfrm>
+          <a:prstGeom prst="rect">
+            <a:avLst/>
+          </a:prstGeom>
+          <a:noFill/>
+          <a:ln/>
+        </p:spPr>
+        <p:txBody>
+          <a:bodyPr wrap="square" lIns="0" tIns="0" rIns="0" bIns="0" rtlCol="0" anchor="ctr"/>
+          <a:lstStyle/>
+          <a:p>
+            <a:pPr indent="0" marL="0">
+              <a:lnSpc>
+                <a:spcPts val="2200"/>
+              </a:lnSpc>
+              <a:buNone/>
+            </a:pPr>
+            <a:r>
+              <a:rPr lang="en-US" sz="1500" dirty="0">
+                <a:solidFill>
+                  <a:srgbClr val="BFC7D2"/>
+                </a:solidFill>
+                <a:latin typeface="Calibri" pitchFamily="34" charset="0"/>
+                <a:ea typeface="Calibri" pitchFamily="34" charset="-122"/>
+                <a:cs typeface="Calibri" pitchFamily="34" charset="-120"/>
+              </a:rPr>
+              <a:t>Пороговый вариант публиковался до первого запуска обучения, чтобы сравнение нельзя было построить задним числом. Обе модели — градиентный бустинг по признакам пикселя; по гари деление идёт по пожарам, а не по чипам, иначе соседние фрагменты одного пожара попадут по разные стороны; по активному горению так не выйдет — признак события в разметке пуст, и это записано в ограничениях.</a:t>
+            </a:r>
+            <a:endParaRPr lang="en-US" sz="1500" dirty="0"/>
+          </a:p>
+        </p:txBody>
+      </p:sp>
+      <p:sp>
+        <p:nvSpPr>
+          <p:cNvPr id="4" name="Shape 2"/>
           <p:cNvSpPr/>
           <p:nvPr/>
         </p:nvSpPr>
         <p:spPr>
           <a:xfrm>
-            <a:off x="685800" y="1554480"/>
-            <a:ext cx="3395472" cy="2286000"/>
+            <a:off x="685800" y="2395728"/>
+            <a:ext cx="10789920" cy="2331720"/>
           </a:xfrm>
           <a:prstGeom prst="roundRect">
             <a:avLst>
-              <a:gd name="adj" fmla="val 3600"/>
+              <a:gd name="adj" fmla="val 3529"/>
             </a:avLst>
           </a:prstGeom>
           <a:solidFill>
@@ -4769,97 +5862,900 @@
       </p:sp>
       <p:sp>
         <p:nvSpPr>
-          <p:cNvPr id="4" name="Text 2"/>
-          <p:cNvSpPr txBox="1"/>
-          <p:nvPr/>
-        </p:nvSpPr>
-        <p:spPr>
-          <a:xfrm>
-            <a:off x="960120" y="1755648"/>
-            <a:ext cx="2846832" cy="685800"/>
-          </a:xfrm>
-          <a:prstGeom prst="rect">
-            <a:avLst/>
-          </a:prstGeom>
-          <a:noFill/>
-          <a:ln/>
-        </p:spPr>
-        <p:txBody>
-          <a:bodyPr wrap="square" lIns="0" tIns="0" rIns="0" bIns="0" rtlCol="0" anchor="ctr"/>
-          <a:lstStyle/>
-          <a:p>
-            <a:pPr indent="0" marL="0">
-              <a:lnSpc>
-                <a:spcPts val="2100"/>
-              </a:lnSpc>
-              <a:buNone/>
-            </a:pPr>
-            <a:r>
-              <a:rPr lang="en-US" sz="1600" b="1" dirty="0">
-                <a:solidFill>
-                  <a:srgbClr val="F0A132"/>
+          <p:cNvPr id="5" name="Text 3"/>
+          <p:cNvSpPr txBox="1"/>
+          <p:nvPr/>
+        </p:nvSpPr>
+        <p:spPr>
+          <a:xfrm>
+            <a:off x="1005840" y="2560320"/>
+            <a:ext cx="1645920" cy="274320"/>
+          </a:xfrm>
+          <a:prstGeom prst="rect">
+            <a:avLst/>
+          </a:prstGeom>
+          <a:noFill/>
+          <a:ln/>
+        </p:spPr>
+        <p:txBody>
+          <a:bodyPr wrap="square" lIns="0" tIns="0" rIns="0" bIns="0" rtlCol="0" anchor="ctr"/>
+          <a:lstStyle/>
+          <a:p>
+            <a:pPr indent="0" marL="0">
+              <a:buNone/>
+            </a:pPr>
+            <a:r>
+              <a:rPr lang="en-US" sz="1200" b="1" dirty="0">
+                <a:solidFill>
+                  <a:srgbClr val="8D97A5"/>
                 </a:solidFill>
                 <a:latin typeface="Calibri" pitchFamily="34" charset="0"/>
                 <a:ea typeface="Calibri" pitchFamily="34" charset="-122"/>
                 <a:cs typeface="Calibri" pitchFamily="34" charset="-120"/>
               </a:rPr>
-              <a:t>Площадь не сверена с землёй</a:t>
-            </a:r>
-            <a:endParaRPr lang="en-US" sz="1600" dirty="0"/>
-          </a:p>
-        </p:txBody>
-      </p:sp>
-      <p:sp>
-        <p:nvSpPr>
-          <p:cNvPr id="5" name="Text 3"/>
-          <p:cNvSpPr txBox="1"/>
-          <p:nvPr/>
-        </p:nvSpPr>
-        <p:spPr>
-          <a:xfrm>
-            <a:off x="960120" y="2487168"/>
-            <a:ext cx="2846832" cy="1188720"/>
-          </a:xfrm>
-          <a:prstGeom prst="rect">
-            <a:avLst/>
-          </a:prstGeom>
-          <a:noFill/>
-          <a:ln/>
-        </p:spPr>
-        <p:txBody>
-          <a:bodyPr wrap="square" lIns="0" tIns="0" rIns="0" bIns="0" rtlCol="0" anchor="ctr"/>
-          <a:lstStyle/>
-          <a:p>
-            <a:pPr indent="0" marL="0">
-              <a:lnSpc>
-                <a:spcPts val="1900"/>
-              </a:lnSpc>
-              <a:buNone/>
-            </a:pPr>
-            <a:r>
-              <a:rPr lang="en-US" sz="1300" dirty="0">
-                <a:solidFill>
-                  <a:srgbClr val="BFC7D2"/>
+              <a:t>Что измеряем</a:t>
+            </a:r>
+            <a:endParaRPr lang="en-US" sz="1200" dirty="0"/>
+          </a:p>
+        </p:txBody>
+      </p:sp>
+      <p:sp>
+        <p:nvSpPr>
+          <p:cNvPr id="6" name="Text 4"/>
+          <p:cNvSpPr txBox="1"/>
+          <p:nvPr/>
+        </p:nvSpPr>
+        <p:spPr>
+          <a:xfrm>
+            <a:off x="5257800" y="2560320"/>
+            <a:ext cx="1645920" cy="274320"/>
+          </a:xfrm>
+          <a:prstGeom prst="rect">
+            <a:avLst/>
+          </a:prstGeom>
+          <a:noFill/>
+          <a:ln/>
+        </p:spPr>
+        <p:txBody>
+          <a:bodyPr wrap="square" lIns="0" tIns="0" rIns="0" bIns="0" rtlCol="0" anchor="ctr"/>
+          <a:lstStyle/>
+          <a:p>
+            <a:pPr indent="0" marL="0">
+              <a:buNone/>
+            </a:pPr>
+            <a:r>
+              <a:rPr lang="en-US" sz="1200" b="1" dirty="0">
+                <a:solidFill>
+                  <a:srgbClr val="8D97A5"/>
                 </a:solidFill>
                 <a:latin typeface="Calibri" pitchFamily="34" charset="0"/>
                 <a:ea typeface="Calibri" pitchFamily="34" charset="-122"/>
                 <a:cs typeface="Calibri" pitchFamily="34" charset="-120"/>
               </a:rPr>
-              <a:t>Проверка по термоточкам ловит грубое расхождение, но саму площадь не измеряет. Сверка с контрольными продуктами запланирована и не выполнена.</a:t>
-            </a:r>
-            <a:endParaRPr lang="en-US" sz="1300" dirty="0"/>
-          </a:p>
-        </p:txBody>
-      </p:sp>
-      <p:sp>
-        <p:nvSpPr>
-          <p:cNvPr id="6" name="Shape 4"/>
+              <a:t>Порог</a:t>
+            </a:r>
+            <a:endParaRPr lang="en-US" sz="1200" dirty="0"/>
+          </a:p>
+        </p:txBody>
+      </p:sp>
+      <p:sp>
+        <p:nvSpPr>
+          <p:cNvPr id="7" name="Text 5"/>
+          <p:cNvSpPr txBox="1"/>
+          <p:nvPr/>
+        </p:nvSpPr>
+        <p:spPr>
+          <a:xfrm>
+            <a:off x="7086600" y="2560320"/>
+            <a:ext cx="1645920" cy="274320"/>
+          </a:xfrm>
+          <a:prstGeom prst="rect">
+            <a:avLst/>
+          </a:prstGeom>
+          <a:noFill/>
+          <a:ln/>
+        </p:spPr>
+        <p:txBody>
+          <a:bodyPr wrap="square" lIns="0" tIns="0" rIns="0" bIns="0" rtlCol="0" anchor="ctr"/>
+          <a:lstStyle/>
+          <a:p>
+            <a:pPr indent="0" marL="0">
+              <a:buNone/>
+            </a:pPr>
+            <a:r>
+              <a:rPr lang="en-US" sz="1200" b="1" dirty="0">
+                <a:solidFill>
+                  <a:srgbClr val="8D97A5"/>
+                </a:solidFill>
+                <a:latin typeface="Calibri" pitchFamily="34" charset="0"/>
+                <a:ea typeface="Calibri" pitchFamily="34" charset="-122"/>
+                <a:cs typeface="Calibri" pitchFamily="34" charset="-120"/>
+              </a:rPr>
+              <a:t>Модель</a:t>
+            </a:r>
+            <a:endParaRPr lang="en-US" sz="1200" dirty="0"/>
+          </a:p>
+        </p:txBody>
+      </p:sp>
+      <p:sp>
+        <p:nvSpPr>
+          <p:cNvPr id="8" name="Text 6"/>
+          <p:cNvSpPr txBox="1"/>
+          <p:nvPr/>
+        </p:nvSpPr>
+        <p:spPr>
+          <a:xfrm>
+            <a:off x="9006840" y="2560320"/>
+            <a:ext cx="2743200" cy="274320"/>
+          </a:xfrm>
+          <a:prstGeom prst="rect">
+            <a:avLst/>
+          </a:prstGeom>
+          <a:noFill/>
+          <a:ln/>
+        </p:spPr>
+        <p:txBody>
+          <a:bodyPr wrap="square" lIns="0" tIns="0" rIns="0" bIns="0" rtlCol="0" anchor="ctr"/>
+          <a:lstStyle/>
+          <a:p>
+            <a:pPr indent="0" marL="0">
+              <a:buNone/>
+            </a:pPr>
+            <a:r>
+              <a:rPr lang="en-US" sz="1200" b="1" dirty="0">
+                <a:solidFill>
+                  <a:srgbClr val="8D97A5"/>
+                </a:solidFill>
+                <a:latin typeface="Calibri" pitchFamily="34" charset="0"/>
+                <a:ea typeface="Calibri" pitchFamily="34" charset="-122"/>
+                <a:cs typeface="Calibri" pitchFamily="34" charset="-120"/>
+              </a:rPr>
+              <a:t>Комментарий</a:t>
+            </a:r>
+            <a:endParaRPr lang="en-US" sz="1200" dirty="0"/>
+          </a:p>
+        </p:txBody>
+      </p:sp>
+      <p:sp>
+        <p:nvSpPr>
+          <p:cNvPr id="9" name="Text 7"/>
+          <p:cNvSpPr txBox="1"/>
+          <p:nvPr/>
+        </p:nvSpPr>
+        <p:spPr>
+          <a:xfrm>
+            <a:off x="1005840" y="2971800"/>
+            <a:ext cx="4023360" cy="365760"/>
+          </a:xfrm>
+          <a:prstGeom prst="rect">
+            <a:avLst/>
+          </a:prstGeom>
+          <a:noFill/>
+          <a:ln/>
+        </p:spPr>
+        <p:txBody>
+          <a:bodyPr wrap="square" lIns="0" tIns="0" rIns="0" bIns="0" rtlCol="0" anchor="ctr"/>
+          <a:lstStyle/>
+          <a:p>
+            <a:pPr indent="0" marL="0">
+              <a:buNone/>
+            </a:pPr>
+            <a:r>
+              <a:rPr lang="en-US" sz="1400" dirty="0">
+                <a:solidFill>
+                  <a:srgbClr val="E6E9EE"/>
+                </a:solidFill>
+                <a:latin typeface="Calibri" pitchFamily="34" charset="0"/>
+                <a:ea typeface="Calibri" pitchFamily="34" charset="-122"/>
+                <a:cs typeface="Calibri" pitchFamily="34" charset="-120"/>
+              </a:rPr>
+              <a:t>Активное горение, F1</a:t>
+            </a:r>
+            <a:endParaRPr lang="en-US" sz="1400" dirty="0"/>
+          </a:p>
+        </p:txBody>
+      </p:sp>
+      <p:sp>
+        <p:nvSpPr>
+          <p:cNvPr id="10" name="Text 8"/>
+          <p:cNvSpPr txBox="1"/>
+          <p:nvPr/>
+        </p:nvSpPr>
+        <p:spPr>
+          <a:xfrm>
+            <a:off x="5257800" y="2971800"/>
+            <a:ext cx="1554480" cy="365760"/>
+          </a:xfrm>
+          <a:prstGeom prst="rect">
+            <a:avLst/>
+          </a:prstGeom>
+          <a:noFill/>
+          <a:ln/>
+        </p:spPr>
+        <p:txBody>
+          <a:bodyPr wrap="square" lIns="0" tIns="0" rIns="0" bIns="0" rtlCol="0" anchor="ctr"/>
+          <a:lstStyle/>
+          <a:p>
+            <a:pPr indent="0" marL="0">
+              <a:buNone/>
+            </a:pPr>
+            <a:r>
+              <a:rPr lang="en-US" sz="1600" dirty="0">
+                <a:solidFill>
+                  <a:srgbClr val="8D97A5"/>
+                </a:solidFill>
+                <a:latin typeface="Courier New" pitchFamily="34" charset="0"/>
+                <a:ea typeface="Courier New" pitchFamily="34" charset="-122"/>
+                <a:cs typeface="Courier New" pitchFamily="34" charset="-120"/>
+              </a:rPr>
+              <a:t>0.599</a:t>
+            </a:r>
+            <a:endParaRPr lang="en-US" sz="1600" dirty="0"/>
+          </a:p>
+        </p:txBody>
+      </p:sp>
+      <p:sp>
+        <p:nvSpPr>
+          <p:cNvPr id="11" name="Text 9"/>
+          <p:cNvSpPr txBox="1"/>
+          <p:nvPr/>
+        </p:nvSpPr>
+        <p:spPr>
+          <a:xfrm>
+            <a:off x="7086600" y="2971800"/>
+            <a:ext cx="1554480" cy="365760"/>
+          </a:xfrm>
+          <a:prstGeom prst="rect">
+            <a:avLst/>
+          </a:prstGeom>
+          <a:noFill/>
+          <a:ln/>
+        </p:spPr>
+        <p:txBody>
+          <a:bodyPr wrap="square" lIns="0" tIns="0" rIns="0" bIns="0" rtlCol="0" anchor="ctr"/>
+          <a:lstStyle/>
+          <a:p>
+            <a:pPr indent="0" marL="0">
+              <a:buNone/>
+            </a:pPr>
+            <a:r>
+              <a:rPr lang="en-US" sz="1600" b="1" dirty="0">
+                <a:solidFill>
+                  <a:srgbClr val="5BC8AF"/>
+                </a:solidFill>
+                <a:latin typeface="Courier New" pitchFamily="34" charset="0"/>
+                <a:ea typeface="Courier New" pitchFamily="34" charset="-122"/>
+                <a:cs typeface="Courier New" pitchFamily="34" charset="-120"/>
+              </a:rPr>
+              <a:t>0.884</a:t>
+            </a:r>
+            <a:endParaRPr lang="en-US" sz="1600" dirty="0"/>
+          </a:p>
+        </p:txBody>
+      </p:sp>
+      <p:sp>
+        <p:nvSpPr>
+          <p:cNvPr id="12" name="Text 10"/>
+          <p:cNvSpPr txBox="1"/>
+          <p:nvPr/>
+        </p:nvSpPr>
+        <p:spPr>
+          <a:xfrm>
+            <a:off x="9006840" y="2971800"/>
+            <a:ext cx="2834640" cy="365760"/>
+          </a:xfrm>
+          <a:prstGeom prst="rect">
+            <a:avLst/>
+          </a:prstGeom>
+          <a:noFill/>
+          <a:ln/>
+        </p:spPr>
+        <p:txBody>
+          <a:bodyPr wrap="square" lIns="0" tIns="0" rIns="0" bIns="0" rtlCol="0" anchor="ctr"/>
+          <a:lstStyle/>
+          <a:p>
+            <a:pPr indent="0" marL="0">
+              <a:buNone/>
+            </a:pPr>
+            <a:r>
+              <a:rPr lang="en-US" sz="1200" dirty="0">
+                <a:solidFill>
+                  <a:srgbClr val="8D97A5"/>
+                </a:solidFill>
+                <a:latin typeface="Calibri" pitchFamily="34" charset="0"/>
+                <a:ea typeface="Calibri" pitchFamily="34" charset="-122"/>
+                <a:cs typeface="Calibri" pitchFamily="34" charset="-120"/>
+              </a:rPr>
+              <a:t>recall 0.47 → 0.94</a:t>
+            </a:r>
+            <a:endParaRPr lang="en-US" sz="1200" dirty="0"/>
+          </a:p>
+        </p:txBody>
+      </p:sp>
+      <p:sp>
+        <p:nvSpPr>
+          <p:cNvPr id="13" name="Text 11"/>
+          <p:cNvSpPr txBox="1"/>
+          <p:nvPr/>
+        </p:nvSpPr>
+        <p:spPr>
+          <a:xfrm>
+            <a:off x="1005840" y="3520440"/>
+            <a:ext cx="4023360" cy="365760"/>
+          </a:xfrm>
+          <a:prstGeom prst="rect">
+            <a:avLst/>
+          </a:prstGeom>
+          <a:noFill/>
+          <a:ln/>
+        </p:spPr>
+        <p:txBody>
+          <a:bodyPr wrap="square" lIns="0" tIns="0" rIns="0" bIns="0" rtlCol="0" anchor="ctr"/>
+          <a:lstStyle/>
+          <a:p>
+            <a:pPr indent="0" marL="0">
+              <a:buNone/>
+            </a:pPr>
+            <a:r>
+              <a:rPr lang="en-US" sz="1400" dirty="0">
+                <a:solidFill>
+                  <a:srgbClr val="E6E9EE"/>
+                </a:solidFill>
+                <a:latin typeface="Calibri" pitchFamily="34" charset="0"/>
+                <a:ea typeface="Calibri" pitchFamily="34" charset="-122"/>
+                <a:cs typeface="Calibri" pitchFamily="34" charset="-120"/>
+              </a:rPr>
+              <a:t>Площадь гари, IoU</a:t>
+            </a:r>
+            <a:endParaRPr lang="en-US" sz="1400" dirty="0"/>
+          </a:p>
+        </p:txBody>
+      </p:sp>
+      <p:sp>
+        <p:nvSpPr>
+          <p:cNvPr id="14" name="Text 12"/>
+          <p:cNvSpPr txBox="1"/>
+          <p:nvPr/>
+        </p:nvSpPr>
+        <p:spPr>
+          <a:xfrm>
+            <a:off x="5257800" y="3520440"/>
+            <a:ext cx="1554480" cy="365760"/>
+          </a:xfrm>
+          <a:prstGeom prst="rect">
+            <a:avLst/>
+          </a:prstGeom>
+          <a:noFill/>
+          <a:ln/>
+        </p:spPr>
+        <p:txBody>
+          <a:bodyPr wrap="square" lIns="0" tIns="0" rIns="0" bIns="0" rtlCol="0" anchor="ctr"/>
+          <a:lstStyle/>
+          <a:p>
+            <a:pPr indent="0" marL="0">
+              <a:buNone/>
+            </a:pPr>
+            <a:r>
+              <a:rPr lang="en-US" sz="1600" dirty="0">
+                <a:solidFill>
+                  <a:srgbClr val="8D97A5"/>
+                </a:solidFill>
+                <a:latin typeface="Courier New" pitchFamily="34" charset="0"/>
+                <a:ea typeface="Courier New" pitchFamily="34" charset="-122"/>
+                <a:cs typeface="Courier New" pitchFamily="34" charset="-120"/>
+              </a:rPr>
+              <a:t>0.390</a:t>
+            </a:r>
+            <a:endParaRPr lang="en-US" sz="1600" dirty="0"/>
+          </a:p>
+        </p:txBody>
+      </p:sp>
+      <p:sp>
+        <p:nvSpPr>
+          <p:cNvPr id="15" name="Text 13"/>
+          <p:cNvSpPr txBox="1"/>
+          <p:nvPr/>
+        </p:nvSpPr>
+        <p:spPr>
+          <a:xfrm>
+            <a:off x="7086600" y="3520440"/>
+            <a:ext cx="1554480" cy="365760"/>
+          </a:xfrm>
+          <a:prstGeom prst="rect">
+            <a:avLst/>
+          </a:prstGeom>
+          <a:noFill/>
+          <a:ln/>
+        </p:spPr>
+        <p:txBody>
+          <a:bodyPr wrap="square" lIns="0" tIns="0" rIns="0" bIns="0" rtlCol="0" anchor="ctr"/>
+          <a:lstStyle/>
+          <a:p>
+            <a:pPr indent="0" marL="0">
+              <a:buNone/>
+            </a:pPr>
+            <a:r>
+              <a:rPr lang="en-US" sz="1600" b="1" dirty="0">
+                <a:solidFill>
+                  <a:srgbClr val="5BC8AF"/>
+                </a:solidFill>
+                <a:latin typeface="Courier New" pitchFamily="34" charset="0"/>
+                <a:ea typeface="Courier New" pitchFamily="34" charset="-122"/>
+                <a:cs typeface="Courier New" pitchFamily="34" charset="-120"/>
+              </a:rPr>
+              <a:t>0.399</a:t>
+            </a:r>
+            <a:endParaRPr lang="en-US" sz="1600" dirty="0"/>
+          </a:p>
+        </p:txBody>
+      </p:sp>
+      <p:sp>
+        <p:nvSpPr>
+          <p:cNvPr id="16" name="Text 14"/>
+          <p:cNvSpPr txBox="1"/>
+          <p:nvPr/>
+        </p:nvSpPr>
+        <p:spPr>
+          <a:xfrm>
+            <a:off x="9006840" y="3520440"/>
+            <a:ext cx="2834640" cy="365760"/>
+          </a:xfrm>
+          <a:prstGeom prst="rect">
+            <a:avLst/>
+          </a:prstGeom>
+          <a:noFill/>
+          <a:ln/>
+        </p:spPr>
+        <p:txBody>
+          <a:bodyPr wrap="square" lIns="0" tIns="0" rIns="0" bIns="0" rtlCol="0" anchor="ctr"/>
+          <a:lstStyle/>
+          <a:p>
+            <a:pPr indent="0" marL="0">
+              <a:buNone/>
+            </a:pPr>
+            <a:r>
+              <a:rPr lang="en-US" sz="1200" dirty="0">
+                <a:solidFill>
+                  <a:srgbClr val="8D97A5"/>
+                </a:solidFill>
+                <a:latin typeface="Calibri" pitchFamily="34" charset="0"/>
+                <a:ea typeface="Calibri" pitchFamily="34" charset="-122"/>
+                <a:cs typeface="Calibri" pitchFamily="34" charset="-120"/>
+              </a:rPr>
+              <a:t>перевес в пределах шума</a:t>
+            </a:r>
+            <a:endParaRPr lang="en-US" sz="1200" dirty="0"/>
+          </a:p>
+        </p:txBody>
+      </p:sp>
+      <p:sp>
+        <p:nvSpPr>
+          <p:cNvPr id="17" name="Text 15"/>
+          <p:cNvSpPr txBox="1"/>
+          <p:nvPr/>
+        </p:nvSpPr>
+        <p:spPr>
+          <a:xfrm>
+            <a:off x="1005840" y="4069080"/>
+            <a:ext cx="4023360" cy="365760"/>
+          </a:xfrm>
+          <a:prstGeom prst="rect">
+            <a:avLst/>
+          </a:prstGeom>
+          <a:noFill/>
+          <a:ln/>
+        </p:spPr>
+        <p:txBody>
+          <a:bodyPr wrap="square" lIns="0" tIns="0" rIns="0" bIns="0" rtlCol="0" anchor="ctr"/>
+          <a:lstStyle/>
+          <a:p>
+            <a:pPr indent="0" marL="0">
+              <a:buNone/>
+            </a:pPr>
+            <a:r>
+              <a:rPr lang="en-US" sz="1400" dirty="0">
+                <a:solidFill>
+                  <a:srgbClr val="E6E9EE"/>
+                </a:solidFill>
+                <a:latin typeface="Calibri" pitchFamily="34" charset="0"/>
+                <a:ea typeface="Calibri" pitchFamily="34" charset="-122"/>
+                <a:cs typeface="Calibri" pitchFamily="34" charset="-120"/>
+              </a:rPr>
+              <a:t>Степень поражения, mIoU</a:t>
+            </a:r>
+            <a:endParaRPr lang="en-US" sz="1400" dirty="0"/>
+          </a:p>
+        </p:txBody>
+      </p:sp>
+      <p:sp>
+        <p:nvSpPr>
+          <p:cNvPr id="18" name="Text 16"/>
+          <p:cNvSpPr txBox="1"/>
+          <p:nvPr/>
+        </p:nvSpPr>
+        <p:spPr>
+          <a:xfrm>
+            <a:off x="5257800" y="4069080"/>
+            <a:ext cx="1554480" cy="365760"/>
+          </a:xfrm>
+          <a:prstGeom prst="rect">
+            <a:avLst/>
+          </a:prstGeom>
+          <a:noFill/>
+          <a:ln/>
+        </p:spPr>
+        <p:txBody>
+          <a:bodyPr wrap="square" lIns="0" tIns="0" rIns="0" bIns="0" rtlCol="0" anchor="ctr"/>
+          <a:lstStyle/>
+          <a:p>
+            <a:pPr indent="0" marL="0">
+              <a:buNone/>
+            </a:pPr>
+            <a:r>
+              <a:rPr lang="en-US" sz="1600" dirty="0">
+                <a:solidFill>
+                  <a:srgbClr val="8D97A5"/>
+                </a:solidFill>
+                <a:latin typeface="Courier New" pitchFamily="34" charset="0"/>
+                <a:ea typeface="Courier New" pitchFamily="34" charset="-122"/>
+                <a:cs typeface="Courier New" pitchFamily="34" charset="-120"/>
+              </a:rPr>
+              <a:t>0.155</a:t>
+            </a:r>
+            <a:endParaRPr lang="en-US" sz="1600" dirty="0"/>
+          </a:p>
+        </p:txBody>
+      </p:sp>
+      <p:sp>
+        <p:nvSpPr>
+          <p:cNvPr id="19" name="Text 17"/>
+          <p:cNvSpPr txBox="1"/>
+          <p:nvPr/>
+        </p:nvSpPr>
+        <p:spPr>
+          <a:xfrm>
+            <a:off x="7086600" y="4069080"/>
+            <a:ext cx="1554480" cy="365760"/>
+          </a:xfrm>
+          <a:prstGeom prst="rect">
+            <a:avLst/>
+          </a:prstGeom>
+          <a:noFill/>
+          <a:ln/>
+        </p:spPr>
+        <p:txBody>
+          <a:bodyPr wrap="square" lIns="0" tIns="0" rIns="0" bIns="0" rtlCol="0" anchor="ctr"/>
+          <a:lstStyle/>
+          <a:p>
+            <a:pPr indent="0" marL="0">
+              <a:buNone/>
+            </a:pPr>
+            <a:r>
+              <a:rPr lang="en-US" sz="1600" b="1" dirty="0">
+                <a:solidFill>
+                  <a:srgbClr val="5BC8AF"/>
+                </a:solidFill>
+                <a:latin typeface="Courier New" pitchFamily="34" charset="0"/>
+                <a:ea typeface="Courier New" pitchFamily="34" charset="-122"/>
+                <a:cs typeface="Courier New" pitchFamily="34" charset="-120"/>
+              </a:rPr>
+              <a:t>0.392</a:t>
+            </a:r>
+            <a:endParaRPr lang="en-US" sz="1600" dirty="0"/>
+          </a:p>
+        </p:txBody>
+      </p:sp>
+      <p:sp>
+        <p:nvSpPr>
+          <p:cNvPr id="20" name="Text 18"/>
+          <p:cNvSpPr txBox="1"/>
+          <p:nvPr/>
+        </p:nvSpPr>
+        <p:spPr>
+          <a:xfrm>
+            <a:off x="9006840" y="4069080"/>
+            <a:ext cx="2834640" cy="365760"/>
+          </a:xfrm>
+          <a:prstGeom prst="rect">
+            <a:avLst/>
+          </a:prstGeom>
+          <a:noFill/>
+          <a:ln/>
+        </p:spPr>
+        <p:txBody>
+          <a:bodyPr wrap="square" lIns="0" tIns="0" rIns="0" bIns="0" rtlCol="0" anchor="ctr"/>
+          <a:lstStyle/>
+          <a:p>
+            <a:pPr indent="0" marL="0">
+              <a:buNone/>
+            </a:pPr>
+            <a:r>
+              <a:rPr lang="en-US" sz="1200" dirty="0">
+                <a:solidFill>
+                  <a:srgbClr val="8D97A5"/>
+                </a:solidFill>
+                <a:latin typeface="Calibri" pitchFamily="34" charset="0"/>
+                <a:ea typeface="Calibri" pitchFamily="34" charset="-122"/>
+                <a:cs typeface="Calibri" pitchFamily="34" charset="-120"/>
+              </a:rPr>
+              <a:t>рост в 2.5 раза</a:t>
+            </a:r>
+            <a:endParaRPr lang="en-US" sz="1200" dirty="0"/>
+          </a:p>
+        </p:txBody>
+      </p:sp>
+      <p:sp>
+        <p:nvSpPr>
+          <p:cNvPr id="21" name="Text 19"/>
+          <p:cNvSpPr txBox="1"/>
+          <p:nvPr/>
+        </p:nvSpPr>
+        <p:spPr>
+          <a:xfrm>
+            <a:off x="1005840" y="4160520"/>
+            <a:ext cx="10149840" cy="457200"/>
+          </a:xfrm>
+          <a:prstGeom prst="rect">
+            <a:avLst/>
+          </a:prstGeom>
+          <a:noFill/>
+          <a:ln/>
+        </p:spPr>
+        <p:txBody>
+          <a:bodyPr wrap="square" lIns="0" tIns="0" rIns="0" bIns="0" rtlCol="0" anchor="ctr"/>
+          <a:lstStyle/>
+          <a:p>
+            <a:pPr indent="0" marL="0">
+              <a:lnSpc>
+                <a:spcPts val="1800"/>
+              </a:lnSpc>
+              <a:buNone/>
+            </a:pPr>
+            <a:r>
+              <a:rPr lang="en-US" sz="1250" dirty="0">
+                <a:solidFill>
+                  <a:srgbClr val="BFC7D2"/>
+                </a:solidFill>
+                <a:latin typeface="Calibri" pitchFamily="34" charset="0"/>
+                <a:ea typeface="Calibri" pitchFamily="34" charset="-122"/>
+                <a:cs typeface="Calibri" pitchFamily="34" charset="-120"/>
+              </a:rPr>
+              <a:t>Признаки пикселя, а не один порог на чип: индексы гари, тип покрова, уклон, высота, радар. Шкала степеней поражения из учебника выведена для хвойного леса — в степи она распознаёт класс втрое хуже обученной модели, хотя контур гари ловит не хуже.</a:t>
+            </a:r>
+            <a:endParaRPr lang="en-US" sz="1250" dirty="0"/>
+          </a:p>
+        </p:txBody>
+      </p:sp>
+      <p:sp>
+        <p:nvSpPr>
+          <p:cNvPr id="22" name="Shape 20"/>
           <p:cNvSpPr/>
           <p:nvPr/>
         </p:nvSpPr>
         <p:spPr>
           <a:xfrm>
-            <a:off x="4383024" y="1554480"/>
+            <a:off x="685800" y="4892040"/>
+            <a:ext cx="10789920" cy="868680"/>
+          </a:xfrm>
+          <a:prstGeom prst="roundRect">
+            <a:avLst>
+              <a:gd name="adj" fmla="val 9474"/>
+            </a:avLst>
+          </a:prstGeom>
+          <a:solidFill>
+            <a:srgbClr val="1A1113"/>
+          </a:solidFill>
+          <a:ln w="12700">
+            <a:solidFill>
+              <a:srgbClr val="2C333D"/>
+            </a:solidFill>
+            <a:prstDash val="solid"/>
+          </a:ln>
+        </p:spPr>
+      </p:sp>
+      <p:sp>
+        <p:nvSpPr>
+          <p:cNvPr id="23" name="Shape 21"/>
+          <p:cNvSpPr/>
+          <p:nvPr/>
+        </p:nvSpPr>
+        <p:spPr>
+          <a:xfrm>
+            <a:off x="1005840" y="5102352"/>
+            <a:ext cx="274320" cy="274320"/>
+          </a:xfrm>
+          <a:prstGeom prst="ellipse">
+            <a:avLst/>
+          </a:prstGeom>
+          <a:solidFill>
+            <a:srgbClr val="B3221F"/>
+          </a:solidFill>
+          <a:ln w="12700">
+            <a:solidFill>
+              <a:srgbClr val="B3221F"/>
+            </a:solidFill>
+            <a:prstDash val="solid"/>
+          </a:ln>
+        </p:spPr>
+      </p:sp>
+      <p:sp>
+        <p:nvSpPr>
+          <p:cNvPr id="24" name="Text 22"/>
+          <p:cNvSpPr txBox="1"/>
+          <p:nvPr/>
+        </p:nvSpPr>
+        <p:spPr>
+          <a:xfrm>
+            <a:off x="1417320" y="5029200"/>
+            <a:ext cx="9692640" cy="640080"/>
+          </a:xfrm>
+          <a:prstGeom prst="rect">
+            <a:avLst/>
+          </a:prstGeom>
+          <a:noFill/>
+          <a:ln/>
+        </p:spPr>
+        <p:txBody>
+          <a:bodyPr wrap="square" lIns="0" tIns="0" rIns="0" bIns="0" rtlCol="0" anchor="ctr"/>
+          <a:lstStyle/>
+          <a:p>
+            <a:pPr indent="0" marL="0">
+              <a:lnSpc>
+                <a:spcPts val="1800"/>
+              </a:lnSpc>
+              <a:buNone/>
+            </a:pPr>
+            <a:r>
+              <a:rPr lang="en-US" sz="1250" b="1" dirty="0">
+                <a:solidFill>
+                  <a:srgbClr val="E6E9EE"/>
+                </a:solidFill>
+                <a:latin typeface="Calibri" pitchFamily="34" charset="0"/>
+                <a:ea typeface="Calibri" pitchFamily="34" charset="-122"/>
+                <a:cs typeface="Calibri" pitchFamily="34" charset="-120"/>
+              </a:rPr>
+              <a:t>Числа посчитаны на своей отложенной части и оценкой на закрытой выборке не являются. </a:t>
+            </a:r>
+            <a:pPr indent="0" marL="0">
+              <a:lnSpc>
+                <a:spcPts val="1800"/>
+              </a:lnSpc>
+              <a:buNone/>
+            </a:pPr>
+            <a:r>
+              <a:rPr lang="en-US" sz="1250" dirty="0">
+                <a:solidFill>
+                  <a:srgbClr val="BFC7D2"/>
+                </a:solidFill>
+                <a:latin typeface="Calibri" pitchFamily="34" charset="0"/>
+                <a:ea typeface="Calibri" pitchFamily="34" charset="-122"/>
+                <a:cs typeface="Calibri" pitchFamily="34" charset="-120"/>
+              </a:rPr>
+              <a:t>Решающая граница и один гиперпараметр подобраны по валидационной части; отложенная тронута один раз, и запись об этом лежит на диске.</a:t>
+            </a:r>
+            <a:endParaRPr lang="en-US" sz="1250" dirty="0"/>
+          </a:p>
+        </p:txBody>
+      </p:sp>
+      <p:sp>
+        <p:nvSpPr>
+          <p:cNvPr id="25" name="Text 23"/>
+          <p:cNvSpPr txBox="1"/>
+          <p:nvPr/>
+        </p:nvSpPr>
+        <p:spPr>
+          <a:xfrm>
+            <a:off x="685800" y="6291072"/>
+            <a:ext cx="10789920" cy="310896"/>
+          </a:xfrm>
+          <a:prstGeom prst="rect">
+            <a:avLst/>
+          </a:prstGeom>
+          <a:noFill/>
+          <a:ln/>
+        </p:spPr>
+        <p:txBody>
+          <a:bodyPr wrap="square" lIns="0" tIns="0" rIns="0" bIns="0" rtlCol="0" anchor="ctr"/>
+          <a:lstStyle/>
+          <a:p>
+            <a:pPr indent="0" marL="0">
+              <a:buNone/>
+            </a:pPr>
+            <a:r>
+              <a:rPr lang="en-US" sz="1100" dirty="0">
+                <a:solidFill>
+                  <a:srgbClr val="6A7179"/>
+                </a:solidFill>
+                <a:latin typeface="Calibri" pitchFamily="34" charset="0"/>
+                <a:ea typeface="Calibri" pitchFamily="34" charset="-122"/>
+                <a:cs typeface="Calibri" pitchFamily="34" charset="-120"/>
+              </a:rPr>
+              <a:t>SPEC-17, SPEC-18, SPEC-19 · 224 чипа гари, 420 чипов активного горения</a:t>
+            </a:r>
+            <a:endParaRPr lang="en-US" sz="1100" dirty="0"/>
+          </a:p>
+        </p:txBody>
+      </p:sp>
+    </p:spTree>
+  </p:cSld>
+  <p:clrMapOvr>
+    <a:masterClrMapping/>
+  </p:clrMapOvr>
+</p:sld>
+</file>
+
+<file path=ppt/slides/slide15.xml><?xml version="1.0" encoding="utf-8"?>
+<p:sld xmlns:a="http://schemas.openxmlformats.org/drawingml/2006/main" xmlns:r="http://schemas.openxmlformats.org/officeDocument/2006/relationships" xmlns:p="http://schemas.openxmlformats.org/presentationml/2006/main">
+  <p:cSld name="Slide 15">
+    <p:bg>
+      <p:bgPr>
+        <a:solidFill>
+          <a:srgbClr val="12151A"/>
+        </a:solidFill>
+      </p:bgPr>
+    </p:bg>
+    <p:spTree>
+      <p:nvGrpSpPr>
+        <p:cNvPr id="1" name=""/>
+        <p:cNvGrpSpPr/>
+        <p:nvPr/>
+      </p:nvGrpSpPr>
+      <p:grpSpPr>
+        <a:xfrm>
+          <a:off x="0" y="0"/>
+          <a:ext cx="0" cy="0"/>
+          <a:chOff x="0" y="0"/>
+          <a:chExt cx="0" cy="0"/>
+        </a:xfrm>
+      </p:grpSpPr>
+      <p:sp>
+        <p:nvSpPr>
+          <p:cNvPr id="2" name="Text 0"/>
+          <p:cNvSpPr txBox="1"/>
+          <p:nvPr/>
+        </p:nvSpPr>
+        <p:spPr>
+          <a:xfrm>
+            <a:off x="685800" y="457200"/>
+            <a:ext cx="10789920" cy="868680"/>
+          </a:xfrm>
+          <a:prstGeom prst="rect">
+            <a:avLst/>
+          </a:prstGeom>
+          <a:noFill/>
+          <a:ln/>
+        </p:spPr>
+        <p:txBody>
+          <a:bodyPr wrap="square" lIns="0" tIns="0" rIns="0" bIns="0" rtlCol="0" anchor="t"/>
+          <a:lstStyle/>
+          <a:p>
+            <a:pPr algn="l" indent="0" marL="0">
+              <a:buNone/>
+            </a:pPr>
+            <a:r>
+              <a:rPr lang="en-US" sz="3600" b="1" dirty="0">
+                <a:solidFill>
+                  <a:srgbClr val="E6E9EE"/>
+                </a:solidFill>
+                <a:latin typeface="Calibri" pitchFamily="34" charset="0"/>
+                <a:ea typeface="Calibri" pitchFamily="34" charset="-122"/>
+                <a:cs typeface="Calibri" pitchFamily="34" charset="-120"/>
+              </a:rPr>
+              <a:t>Чего сервис пока не доказывает</a:t>
+            </a:r>
+            <a:endParaRPr lang="en-US" sz="3600" dirty="0"/>
+          </a:p>
+        </p:txBody>
+      </p:sp>
+      <p:sp>
+        <p:nvSpPr>
+          <p:cNvPr id="3" name="Shape 1"/>
+          <p:cNvSpPr/>
+          <p:nvPr/>
+        </p:nvSpPr>
+        <p:spPr>
+          <a:xfrm>
+            <a:off x="685800" y="1554480"/>
             <a:ext cx="3395472" cy="2286000"/>
           </a:xfrm>
           <a:prstGeom prst="roundRect">
@@ -4880,13 +6776,13 @@
       </p:sp>
       <p:sp>
         <p:nvSpPr>
-          <p:cNvPr id="7" name="Text 5"/>
-          <p:cNvSpPr txBox="1"/>
-          <p:nvPr/>
-        </p:nvSpPr>
-        <p:spPr>
-          <a:xfrm>
-            <a:off x="4657344" y="1755648"/>
+          <p:cNvPr id="4" name="Text 2"/>
+          <p:cNvSpPr txBox="1"/>
+          <p:nvPr/>
+        </p:nvSpPr>
+        <p:spPr>
+          <a:xfrm>
+            <a:off x="960120" y="1755648"/>
             <a:ext cx="2846832" cy="685800"/>
           </a:xfrm>
           <a:prstGeom prst="rect">
@@ -4914,7 +6810,7 @@
                 <a:ea typeface="Calibri" pitchFamily="34" charset="-122"/>
                 <a:cs typeface="Calibri" pitchFamily="34" charset="-120"/>
               </a:rPr>
-              <a:t>Пороги не откалиброваны</a:t>
+              <a:t>Площадь не сверена с землёй</a:t>
             </a:r>
             <a:endParaRPr lang="en-US" sz="1600" dirty="0"/>
           </a:p>
@@ -4922,13 +6818,13 @@
       </p:sp>
       <p:sp>
         <p:nvSpPr>
-          <p:cNvPr id="8" name="Text 6"/>
-          <p:cNvSpPr txBox="1"/>
-          <p:nvPr/>
-        </p:nvSpPr>
-        <p:spPr>
-          <a:xfrm>
-            <a:off x="4657344" y="2487168"/>
+          <p:cNvPr id="5" name="Text 3"/>
+          <p:cNvSpPr txBox="1"/>
+          <p:nvPr/>
+        </p:nvSpPr>
+        <p:spPr>
+          <a:xfrm>
+            <a:off x="960120" y="2487168"/>
             <a:ext cx="2846832" cy="1188720"/>
           </a:xfrm>
           <a:prstGeom prst="rect">
@@ -4956,7 +6852,7 @@
                 <a:ea typeface="Calibri" pitchFamily="34" charset="-122"/>
                 <a:cs typeface="Calibri" pitchFamily="34" charset="-120"/>
               </a:rPr>
-              <a:t>Шкала степени поражения получена на другой растительности. Для лиственничных и тёмнохвойных лесов Сибири она не валидирована.</a:t>
+              <a:t>Проверка по термоточкам ловит грубое расхождение, но саму площадь не измеряет. Сверка с контрольными продуктами запланирована и не выполнена.</a:t>
             </a:r>
             <a:endParaRPr lang="en-US" sz="1300" dirty="0"/>
           </a:p>
@@ -4964,13 +6860,13 @@
       </p:sp>
       <p:sp>
         <p:nvSpPr>
-          <p:cNvPr id="9" name="Shape 7"/>
+          <p:cNvPr id="6" name="Shape 4"/>
           <p:cNvSpPr/>
           <p:nvPr/>
         </p:nvSpPr>
         <p:spPr>
           <a:xfrm>
-            <a:off x="8080248" y="1554480"/>
+            <a:off x="4383024" y="1554480"/>
             <a:ext cx="3395472" cy="2286000"/>
           </a:xfrm>
           <a:prstGeom prst="roundRect">
@@ -4991,6 +6887,117 @@
       </p:sp>
       <p:sp>
         <p:nvSpPr>
+          <p:cNvPr id="7" name="Text 5"/>
+          <p:cNvSpPr txBox="1"/>
+          <p:nvPr/>
+        </p:nvSpPr>
+        <p:spPr>
+          <a:xfrm>
+            <a:off x="4657344" y="1755648"/>
+            <a:ext cx="2846832" cy="685800"/>
+          </a:xfrm>
+          <a:prstGeom prst="rect">
+            <a:avLst/>
+          </a:prstGeom>
+          <a:noFill/>
+          <a:ln/>
+        </p:spPr>
+        <p:txBody>
+          <a:bodyPr wrap="square" lIns="0" tIns="0" rIns="0" bIns="0" rtlCol="0" anchor="ctr"/>
+          <a:lstStyle/>
+          <a:p>
+            <a:pPr indent="0" marL="0">
+              <a:lnSpc>
+                <a:spcPts val="2100"/>
+              </a:lnSpc>
+              <a:buNone/>
+            </a:pPr>
+            <a:r>
+              <a:rPr lang="en-US" sz="1600" b="1" dirty="0">
+                <a:solidFill>
+                  <a:srgbClr val="F0A132"/>
+                </a:solidFill>
+                <a:latin typeface="Calibri" pitchFamily="34" charset="0"/>
+                <a:ea typeface="Calibri" pitchFamily="34" charset="-122"/>
+                <a:cs typeface="Calibri" pitchFamily="34" charset="-120"/>
+              </a:rPr>
+              <a:t>Пороги не откалиброваны</a:t>
+            </a:r>
+            <a:endParaRPr lang="en-US" sz="1600" dirty="0"/>
+          </a:p>
+        </p:txBody>
+      </p:sp>
+      <p:sp>
+        <p:nvSpPr>
+          <p:cNvPr id="8" name="Text 6"/>
+          <p:cNvSpPr txBox="1"/>
+          <p:nvPr/>
+        </p:nvSpPr>
+        <p:spPr>
+          <a:xfrm>
+            <a:off x="4657344" y="2487168"/>
+            <a:ext cx="2846832" cy="1188720"/>
+          </a:xfrm>
+          <a:prstGeom prst="rect">
+            <a:avLst/>
+          </a:prstGeom>
+          <a:noFill/>
+          <a:ln/>
+        </p:spPr>
+        <p:txBody>
+          <a:bodyPr wrap="square" lIns="0" tIns="0" rIns="0" bIns="0" rtlCol="0" anchor="ctr"/>
+          <a:lstStyle/>
+          <a:p>
+            <a:pPr indent="0" marL="0">
+              <a:lnSpc>
+                <a:spcPts val="1900"/>
+              </a:lnSpc>
+              <a:buNone/>
+            </a:pPr>
+            <a:r>
+              <a:rPr lang="en-US" sz="1300" dirty="0">
+                <a:solidFill>
+                  <a:srgbClr val="BFC7D2"/>
+                </a:solidFill>
+                <a:latin typeface="Calibri" pitchFamily="34" charset="0"/>
+                <a:ea typeface="Calibri" pitchFamily="34" charset="-122"/>
+                <a:cs typeface="Calibri" pitchFamily="34" charset="-120"/>
+              </a:rPr>
+              <a:t>Шкала степени поражения получена на другой растительности. Для лиственничных и тёмнохвойных лесов Сибири она не валидирована.</a:t>
+            </a:r>
+            <a:endParaRPr lang="en-US" sz="1300" dirty="0"/>
+          </a:p>
+        </p:txBody>
+      </p:sp>
+      <p:sp>
+        <p:nvSpPr>
+          <p:cNvPr id="9" name="Shape 7"/>
+          <p:cNvSpPr/>
+          <p:nvPr/>
+        </p:nvSpPr>
+        <p:spPr>
+          <a:xfrm>
+            <a:off x="8080248" y="1554480"/>
+            <a:ext cx="3395472" cy="2286000"/>
+          </a:xfrm>
+          <a:prstGeom prst="roundRect">
+            <a:avLst>
+              <a:gd name="adj" fmla="val 3600"/>
+            </a:avLst>
+          </a:prstGeom>
+          <a:solidFill>
+            <a:srgbClr val="1A1F27"/>
+          </a:solidFill>
+          <a:ln w="12700">
+            <a:solidFill>
+              <a:srgbClr val="2C333D"/>
+            </a:solidFill>
+            <a:prstDash val="solid"/>
+          </a:ln>
+        </p:spPr>
+      </p:sp>
+      <p:sp>
+        <p:nvSpPr>
           <p:cNvPr id="10" name="Text 8"/>
           <p:cNvSpPr txBox="1"/>
           <p:nvPr/>
@@ -5253,9 +7260,9 @@
 </p:sld>
 </file>
 
-<file path=ppt/slides/slide14.xml><?xml version="1.0" encoding="utf-8"?>
+<file path=ppt/slides/slide16.xml><?xml version="1.0" encoding="utf-8"?>
 <p:sld xmlns:a="http://schemas.openxmlformats.org/drawingml/2006/main" xmlns:r="http://schemas.openxmlformats.org/officeDocument/2006/relationships" xmlns:p="http://schemas.openxmlformats.org/presentationml/2006/main">
-  <p:cSld name="Slide 14">
+  <p:cSld name="Slide 16">
     <p:bg>
       <p:bgPr>
         <a:solidFill>
